--- a/Day-9/EF_Core_ASPNET_Core.pptx
+++ b/Day-9/EF_Core_ASPNET_Core.pptx
@@ -5,24 +5,23 @@
     <p:sldMasterId id="2147483660" r:id="rId1"/>
   </p:sldMasterIdLst>
   <p:sldIdLst>
-    <p:sldId id="256" r:id="rId2"/>
-    <p:sldId id="257" r:id="rId3"/>
-    <p:sldId id="258" r:id="rId4"/>
-    <p:sldId id="259" r:id="rId5"/>
-    <p:sldId id="260" r:id="rId6"/>
-    <p:sldId id="261" r:id="rId7"/>
-    <p:sldId id="262" r:id="rId8"/>
-    <p:sldId id="263" r:id="rId9"/>
-    <p:sldId id="264" r:id="rId10"/>
-    <p:sldId id="265" r:id="rId11"/>
-    <p:sldId id="266" r:id="rId12"/>
-    <p:sldId id="267" r:id="rId13"/>
-    <p:sldId id="268" r:id="rId14"/>
-    <p:sldId id="269" r:id="rId15"/>
-    <p:sldId id="270" r:id="rId16"/>
-    <p:sldId id="271" r:id="rId17"/>
-    <p:sldId id="272" r:id="rId18"/>
-    <p:sldId id="273" r:id="rId19"/>
+    <p:sldId id="257" r:id="rId2"/>
+    <p:sldId id="258" r:id="rId3"/>
+    <p:sldId id="259" r:id="rId4"/>
+    <p:sldId id="260" r:id="rId5"/>
+    <p:sldId id="261" r:id="rId6"/>
+    <p:sldId id="262" r:id="rId7"/>
+    <p:sldId id="263" r:id="rId8"/>
+    <p:sldId id="264" r:id="rId9"/>
+    <p:sldId id="265" r:id="rId10"/>
+    <p:sldId id="266" r:id="rId11"/>
+    <p:sldId id="267" r:id="rId12"/>
+    <p:sldId id="268" r:id="rId13"/>
+    <p:sldId id="269" r:id="rId14"/>
+    <p:sldId id="270" r:id="rId15"/>
+    <p:sldId id="271" r:id="rId16"/>
+    <p:sldId id="272" r:id="rId17"/>
+    <p:sldId id="273" r:id="rId18"/>
   </p:sldIdLst>
   <p:sldSz cx="9144000" cy="6858000" type="screen4x3"/>
   <p:notesSz cx="6858000" cy="9144000"/>
@@ -6773,7 +6772,7 @@
           <a:p>
             <a:fld id="{5BCAD085-E8A6-8845-BD4E-CB4CCA059FC4}" type="datetimeFigureOut">
               <a:rPr lang="en-US" smtClean="0"/>
-              <a:t>3/25/2026</a:t>
+              <a:t>3/26/2026</a:t>
             </a:fld>
             <a:endParaRPr lang="en-US"/>
           </a:p>
@@ -6980,7 +6979,7 @@
           <a:p>
             <a:fld id="{5BCAD085-E8A6-8845-BD4E-CB4CCA059FC4}" type="datetimeFigureOut">
               <a:rPr lang="en-US" smtClean="0"/>
-              <a:t>3/25/2026</a:t>
+              <a:t>3/26/2026</a:t>
             </a:fld>
             <a:endParaRPr lang="en-US"/>
           </a:p>
@@ -7160,7 +7159,7 @@
           <a:p>
             <a:fld id="{5BCAD085-E8A6-8845-BD4E-CB4CCA059FC4}" type="datetimeFigureOut">
               <a:rPr lang="en-US" smtClean="0"/>
-              <a:t>3/25/2026</a:t>
+              <a:t>3/26/2026</a:t>
             </a:fld>
             <a:endParaRPr lang="en-US"/>
           </a:p>
@@ -7365,7 +7364,7 @@
           <a:p>
             <a:fld id="{5BCAD085-E8A6-8845-BD4E-CB4CCA059FC4}" type="datetimeFigureOut">
               <a:rPr lang="en-US" smtClean="0"/>
-              <a:t>3/25/2026</a:t>
+              <a:t>3/26/2026</a:t>
             </a:fld>
             <a:endParaRPr lang="en-US"/>
           </a:p>
@@ -14103,7 +14102,7 @@
           <a:p>
             <a:fld id="{5BCAD085-E8A6-8845-BD4E-CB4CCA059FC4}" type="datetimeFigureOut">
               <a:rPr lang="en-US" smtClean="0"/>
-              <a:t>3/25/2026</a:t>
+              <a:t>3/26/2026</a:t>
             </a:fld>
             <a:endParaRPr lang="en-US"/>
           </a:p>
@@ -14377,7 +14376,7 @@
           <a:p>
             <a:fld id="{5BCAD085-E8A6-8845-BD4E-CB4CCA059FC4}" type="datetimeFigureOut">
               <a:rPr lang="en-US" smtClean="0"/>
-              <a:t>3/25/2026</a:t>
+              <a:t>3/26/2026</a:t>
             </a:fld>
             <a:endParaRPr lang="en-US"/>
           </a:p>
@@ -14780,7 +14779,7 @@
           <a:p>
             <a:fld id="{5BCAD085-E8A6-8845-BD4E-CB4CCA059FC4}" type="datetimeFigureOut">
               <a:rPr lang="en-US" smtClean="0"/>
-              <a:t>3/25/2026</a:t>
+              <a:t>3/26/2026</a:t>
             </a:fld>
             <a:endParaRPr lang="en-US"/>
           </a:p>
@@ -14898,7 +14897,7 @@
           <a:p>
             <a:fld id="{5BCAD085-E8A6-8845-BD4E-CB4CCA059FC4}" type="datetimeFigureOut">
               <a:rPr lang="en-US" smtClean="0"/>
-              <a:t>3/25/2026</a:t>
+              <a:t>3/26/2026</a:t>
             </a:fld>
             <a:endParaRPr lang="en-US"/>
           </a:p>
@@ -14993,7 +14992,7 @@
           <a:p>
             <a:fld id="{5BCAD085-E8A6-8845-BD4E-CB4CCA059FC4}" type="datetimeFigureOut">
               <a:rPr lang="en-US" smtClean="0"/>
-              <a:t>3/25/2026</a:t>
+              <a:t>3/26/2026</a:t>
             </a:fld>
             <a:endParaRPr lang="en-US"/>
           </a:p>
@@ -15285,7 +15284,7 @@
           <a:p>
             <a:fld id="{5BCAD085-E8A6-8845-BD4E-CB4CCA059FC4}" type="datetimeFigureOut">
               <a:rPr lang="en-US" smtClean="0"/>
-              <a:t>3/25/2026</a:t>
+              <a:t>3/26/2026</a:t>
             </a:fld>
             <a:endParaRPr lang="en-US"/>
           </a:p>
@@ -15565,7 +15564,7 @@
           <a:p>
             <a:fld id="{5BCAD085-E8A6-8845-BD4E-CB4CCA059FC4}" type="datetimeFigureOut">
               <a:rPr lang="en-US" smtClean="0"/>
-              <a:t>3/25/2026</a:t>
+              <a:t>3/26/2026</a:t>
             </a:fld>
             <a:endParaRPr lang="en-US"/>
           </a:p>
@@ -15815,7 +15814,7 @@
           <a:p>
             <a:fld id="{5BCAD085-E8A6-8845-BD4E-CB4CCA059FC4}" type="datetimeFigureOut">
               <a:rPr lang="en-US" smtClean="0"/>
-              <a:t>3/25/2026</a:t>
+              <a:t>3/26/2026</a:t>
             </a:fld>
             <a:endParaRPr lang="en-US"/>
           </a:p>
@@ -16333,7 +16332,7 @@
           <a:lstStyle/>
           <a:p>
             <a:r>
-              <a:t>Entity Framework Core with ASP.NET Core</a:t>
+              <a:t>What is Entity Framework Core?</a:t>
             </a:r>
           </a:p>
         </p:txBody>
@@ -16354,7 +16353,22 @@
           <a:lstStyle/>
           <a:p>
             <a:r>
-              <a:t>Detailed Training Presentation</a:t>
+              <a:t>ORM framework</a:t>
+            </a:r>
+          </a:p>
+          <a:p>
+            <a:r>
+              <a:t>Eliminates manual SQL</a:t>
+            </a:r>
+          </a:p>
+          <a:p>
+            <a:r>
+              <a:t>Works with .NET Core</a:t>
+            </a:r>
+          </a:p>
+          <a:p>
+            <a:r>
+              <a:t>Supports LINQ</a:t>
             </a:r>
           </a:p>
         </p:txBody>
@@ -16368,78 +16382,6 @@
 </file>
 
 <file path=ppt/slides/slide10.xml><?xml version="1.0" encoding="utf-8"?>
-<p:sld xmlns:a="http://schemas.openxmlformats.org/drawingml/2006/main" xmlns:r="http://schemas.openxmlformats.org/officeDocument/2006/relationships" xmlns:p="http://schemas.openxmlformats.org/presentationml/2006/main">
-  <p:cSld>
-    <p:spTree>
-      <p:nvGrpSpPr>
-        <p:cNvPr id="1" name=""/>
-        <p:cNvGrpSpPr/>
-        <p:nvPr/>
-      </p:nvGrpSpPr>
-      <p:grpSpPr>
-        <a:xfrm>
-          <a:off x="0" y="0"/>
-          <a:ext cx="0" cy="0"/>
-          <a:chOff x="0" y="0"/>
-          <a:chExt cx="0" cy="0"/>
-        </a:xfrm>
-      </p:grpSpPr>
-      <p:sp>
-        <p:nvSpPr>
-          <p:cNvPr id="2" name="Title 1"/>
-          <p:cNvSpPr>
-            <a:spLocks noGrp="1"/>
-          </p:cNvSpPr>
-          <p:nvPr>
-            <p:ph type="title"/>
-          </p:nvPr>
-        </p:nvSpPr>
-        <p:spPr/>
-        <p:txBody>
-          <a:bodyPr/>
-          <a:lstStyle/>
-          <a:p>
-            <a:r>
-              <a:t>Configure DbContext</a:t>
-            </a:r>
-          </a:p>
-        </p:txBody>
-      </p:sp>
-      <p:sp>
-        <p:nvSpPr>
-          <p:cNvPr id="3" name="Content Placeholder 2"/>
-          <p:cNvSpPr>
-            <a:spLocks noGrp="1"/>
-          </p:cNvSpPr>
-          <p:nvPr>
-            <p:ph idx="1"/>
-          </p:nvPr>
-        </p:nvSpPr>
-        <p:spPr/>
-        <p:txBody>
-          <a:bodyPr/>
-          <a:lstStyle/>
-          <a:p>
-            <a:r>
-              <a:t>builder.Services.AddDbContext&lt;AppDbContext&gt;(options =&gt;</a:t>
-            </a:r>
-          </a:p>
-          <a:p>
-            <a:r>
-              <a:t>options.UseSqlServer(connectionString));</a:t>
-            </a:r>
-          </a:p>
-        </p:txBody>
-      </p:sp>
-    </p:spTree>
-  </p:cSld>
-  <p:clrMapOvr>
-    <a:masterClrMapping/>
-  </p:clrMapOvr>
-</p:sld>
-</file>
-
-<file path=ppt/slides/slide11.xml><?xml version="1.0" encoding="utf-8"?>
 <p:sld xmlns:a="http://schemas.openxmlformats.org/drawingml/2006/main" xmlns:r="http://schemas.openxmlformats.org/officeDocument/2006/relationships" xmlns:p="http://schemas.openxmlformats.org/presentationml/2006/main">
   <p:cSld>
     <p:spTree>
@@ -16511,7 +16453,7 @@
 </p:sld>
 </file>
 
-<file path=ppt/slides/slide12.xml><?xml version="1.0" encoding="utf-8"?>
+<file path=ppt/slides/slide11.xml><?xml version="1.0" encoding="utf-8"?>
 <p:sld xmlns:a="http://schemas.openxmlformats.org/drawingml/2006/main" xmlns:r="http://schemas.openxmlformats.org/officeDocument/2006/relationships" xmlns:p="http://schemas.openxmlformats.org/presentationml/2006/main">
   <p:cSld>
     <p:spTree>
@@ -16583,7 +16525,7 @@
 </p:sld>
 </file>
 
-<file path=ppt/slides/slide13.xml><?xml version="1.0" encoding="utf-8"?>
+<file path=ppt/slides/slide12.xml><?xml version="1.0" encoding="utf-8"?>
 <p:sld xmlns:a="http://schemas.openxmlformats.org/drawingml/2006/main" xmlns:r="http://schemas.openxmlformats.org/officeDocument/2006/relationships" xmlns:p="http://schemas.openxmlformats.org/presentationml/2006/main">
   <p:cSld>
     <p:spTree>
@@ -16660,7 +16602,7 @@
 </p:sld>
 </file>
 
-<file path=ppt/slides/slide14.xml><?xml version="1.0" encoding="utf-8"?>
+<file path=ppt/slides/slide13.xml><?xml version="1.0" encoding="utf-8"?>
 <p:sld xmlns:a="http://schemas.openxmlformats.org/drawingml/2006/main" xmlns:r="http://schemas.openxmlformats.org/officeDocument/2006/relationships" xmlns:p="http://schemas.openxmlformats.org/presentationml/2006/main">
   <p:cSld>
     <p:spTree>
@@ -16737,7 +16679,7 @@
 </p:sld>
 </file>
 
-<file path=ppt/slides/slide15.xml><?xml version="1.0" encoding="utf-8"?>
+<file path=ppt/slides/slide14.xml><?xml version="1.0" encoding="utf-8"?>
 <p:sld xmlns:a="http://schemas.openxmlformats.org/drawingml/2006/main" xmlns:r="http://schemas.openxmlformats.org/officeDocument/2006/relationships" xmlns:p="http://schemas.openxmlformats.org/presentationml/2006/main">
   <p:cSld>
     <p:spTree>
@@ -16809,7 +16751,7 @@
 </p:sld>
 </file>
 
-<file path=ppt/slides/slide16.xml><?xml version="1.0" encoding="utf-8"?>
+<file path=ppt/slides/slide15.xml><?xml version="1.0" encoding="utf-8"?>
 <p:sld xmlns:a="http://schemas.openxmlformats.org/drawingml/2006/main" xmlns:r="http://schemas.openxmlformats.org/officeDocument/2006/relationships" xmlns:p="http://schemas.openxmlformats.org/presentationml/2006/main">
   <p:cSld>
     <p:spTree>
@@ -16881,7 +16823,7 @@
 </p:sld>
 </file>
 
-<file path=ppt/slides/slide17.xml><?xml version="1.0" encoding="utf-8"?>
+<file path=ppt/slides/slide16.xml><?xml version="1.0" encoding="utf-8"?>
 <p:sld xmlns:a="http://schemas.openxmlformats.org/drawingml/2006/main" xmlns:r="http://schemas.openxmlformats.org/officeDocument/2006/relationships" xmlns:p="http://schemas.openxmlformats.org/presentationml/2006/main">
   <p:cSld>
     <p:spTree>
@@ -16958,7 +16900,7 @@
 </p:sld>
 </file>
 
-<file path=ppt/slides/slide18.xml><?xml version="1.0" encoding="utf-8"?>
+<file path=ppt/slides/slide17.xml><?xml version="1.0" encoding="utf-8"?>
 <p:sld xmlns:a="http://schemas.openxmlformats.org/drawingml/2006/main" xmlns:r="http://schemas.openxmlformats.org/officeDocument/2006/relationships" xmlns:p="http://schemas.openxmlformats.org/presentationml/2006/main">
   <p:cSld>
     <p:spTree>
@@ -17068,88 +17010,6 @@
           <a:lstStyle/>
           <a:p>
             <a:r>
-              <a:t>What is Entity Framework Core?</a:t>
-            </a:r>
-          </a:p>
-        </p:txBody>
-      </p:sp>
-      <p:sp>
-        <p:nvSpPr>
-          <p:cNvPr id="3" name="Content Placeholder 2"/>
-          <p:cNvSpPr>
-            <a:spLocks noGrp="1"/>
-          </p:cNvSpPr>
-          <p:nvPr>
-            <p:ph idx="1"/>
-          </p:nvPr>
-        </p:nvSpPr>
-        <p:spPr/>
-        <p:txBody>
-          <a:bodyPr/>
-          <a:lstStyle/>
-          <a:p>
-            <a:r>
-              <a:t>ORM framework</a:t>
-            </a:r>
-          </a:p>
-          <a:p>
-            <a:r>
-              <a:t>Eliminates manual SQL</a:t>
-            </a:r>
-          </a:p>
-          <a:p>
-            <a:r>
-              <a:t>Works with .NET Core</a:t>
-            </a:r>
-          </a:p>
-          <a:p>
-            <a:r>
-              <a:t>Supports LINQ</a:t>
-            </a:r>
-          </a:p>
-        </p:txBody>
-      </p:sp>
-    </p:spTree>
-  </p:cSld>
-  <p:clrMapOvr>
-    <a:masterClrMapping/>
-  </p:clrMapOvr>
-</p:sld>
-</file>
-
-<file path=ppt/slides/slide3.xml><?xml version="1.0" encoding="utf-8"?>
-<p:sld xmlns:a="http://schemas.openxmlformats.org/drawingml/2006/main" xmlns:r="http://schemas.openxmlformats.org/officeDocument/2006/relationships" xmlns:p="http://schemas.openxmlformats.org/presentationml/2006/main">
-  <p:cSld>
-    <p:spTree>
-      <p:nvGrpSpPr>
-        <p:cNvPr id="1" name=""/>
-        <p:cNvGrpSpPr/>
-        <p:nvPr/>
-      </p:nvGrpSpPr>
-      <p:grpSpPr>
-        <a:xfrm>
-          <a:off x="0" y="0"/>
-          <a:ext cx="0" cy="0"/>
-          <a:chOff x="0" y="0"/>
-          <a:chExt cx="0" cy="0"/>
-        </a:xfrm>
-      </p:grpSpPr>
-      <p:sp>
-        <p:nvSpPr>
-          <p:cNvPr id="2" name="Title 1"/>
-          <p:cNvSpPr>
-            <a:spLocks noGrp="1"/>
-          </p:cNvSpPr>
-          <p:nvPr>
-            <p:ph type="title"/>
-          </p:nvPr>
-        </p:nvSpPr>
-        <p:spPr/>
-        <p:txBody>
-          <a:bodyPr/>
-          <a:lstStyle/>
-          <a:p>
-            <a:r>
               <a:t>Why EF Core?</a:t>
             </a:r>
           </a:p>
@@ -17199,7 +17059,7 @@
 </p:sld>
 </file>
 
-<file path=ppt/slides/slide4.xml><?xml version="1.0" encoding="utf-8"?>
+<file path=ppt/slides/slide3.xml><?xml version="1.0" encoding="utf-8"?>
 <p:sld xmlns:a="http://schemas.openxmlformats.org/drawingml/2006/main" xmlns:r="http://schemas.openxmlformats.org/officeDocument/2006/relationships" xmlns:p="http://schemas.openxmlformats.org/presentationml/2006/main">
   <p:cSld>
     <p:spTree>
@@ -17281,7 +17141,7 @@
 </p:sld>
 </file>
 
-<file path=ppt/slides/slide5.xml><?xml version="1.0" encoding="utf-8"?>
+<file path=ppt/slides/slide4.xml><?xml version="1.0" encoding="utf-8"?>
 <p:sld xmlns:a="http://schemas.openxmlformats.org/drawingml/2006/main" xmlns:r="http://schemas.openxmlformats.org/officeDocument/2006/relationships" xmlns:p="http://schemas.openxmlformats.org/presentationml/2006/main">
   <p:cSld>
     <p:spTree>
@@ -17358,7 +17218,7 @@
 </p:sld>
 </file>
 
-<file path=ppt/slides/slide6.xml><?xml version="1.0" encoding="utf-8"?>
+<file path=ppt/slides/slide5.xml><?xml version="1.0" encoding="utf-8"?>
 <p:sld xmlns:a="http://schemas.openxmlformats.org/drawingml/2006/main" xmlns:r="http://schemas.openxmlformats.org/officeDocument/2006/relationships" xmlns:p="http://schemas.openxmlformats.org/presentationml/2006/main">
   <p:cSld>
     <p:spTree>
@@ -17435,7 +17295,7 @@
 </p:sld>
 </file>
 
-<file path=ppt/slides/slide7.xml><?xml version="1.0" encoding="utf-8"?>
+<file path=ppt/slides/slide6.xml><?xml version="1.0" encoding="utf-8"?>
 <p:sld xmlns:a="http://schemas.openxmlformats.org/drawingml/2006/main" xmlns:r="http://schemas.openxmlformats.org/officeDocument/2006/relationships" xmlns:p="http://schemas.openxmlformats.org/presentationml/2006/main">
   <p:cSld>
     <p:spTree>
@@ -17512,7 +17372,7 @@
 </p:sld>
 </file>
 
-<file path=ppt/slides/slide8.xml><?xml version="1.0" encoding="utf-8"?>
+<file path=ppt/slides/slide7.xml><?xml version="1.0" encoding="utf-8"?>
 <p:sld xmlns:a="http://schemas.openxmlformats.org/drawingml/2006/main" xmlns:r="http://schemas.openxmlformats.org/officeDocument/2006/relationships" xmlns:p="http://schemas.openxmlformats.org/presentationml/2006/main">
   <p:cSld>
     <p:spTree>
@@ -17584,7 +17444,7 @@
 </p:sld>
 </file>
 
-<file path=ppt/slides/slide9.xml><?xml version="1.0" encoding="utf-8"?>
+<file path=ppt/slides/slide8.xml><?xml version="1.0" encoding="utf-8"?>
 <p:sld xmlns:a="http://schemas.openxmlformats.org/drawingml/2006/main" xmlns:r="http://schemas.openxmlformats.org/officeDocument/2006/relationships" xmlns:p="http://schemas.openxmlformats.org/presentationml/2006/main">
   <p:cSld>
     <p:spTree>
@@ -17649,6 +17509,78 @@
           <a:p>
             <a:r>
               <a:t>Inject into controllers</a:t>
+            </a:r>
+          </a:p>
+        </p:txBody>
+      </p:sp>
+    </p:spTree>
+  </p:cSld>
+  <p:clrMapOvr>
+    <a:masterClrMapping/>
+  </p:clrMapOvr>
+</p:sld>
+</file>
+
+<file path=ppt/slides/slide9.xml><?xml version="1.0" encoding="utf-8"?>
+<p:sld xmlns:a="http://schemas.openxmlformats.org/drawingml/2006/main" xmlns:r="http://schemas.openxmlformats.org/officeDocument/2006/relationships" xmlns:p="http://schemas.openxmlformats.org/presentationml/2006/main">
+  <p:cSld>
+    <p:spTree>
+      <p:nvGrpSpPr>
+        <p:cNvPr id="1" name=""/>
+        <p:cNvGrpSpPr/>
+        <p:nvPr/>
+      </p:nvGrpSpPr>
+      <p:grpSpPr>
+        <a:xfrm>
+          <a:off x="0" y="0"/>
+          <a:ext cx="0" cy="0"/>
+          <a:chOff x="0" y="0"/>
+          <a:chExt cx="0" cy="0"/>
+        </a:xfrm>
+      </p:grpSpPr>
+      <p:sp>
+        <p:nvSpPr>
+          <p:cNvPr id="2" name="Title 1"/>
+          <p:cNvSpPr>
+            <a:spLocks noGrp="1"/>
+          </p:cNvSpPr>
+          <p:nvPr>
+            <p:ph type="title"/>
+          </p:nvPr>
+        </p:nvSpPr>
+        <p:spPr/>
+        <p:txBody>
+          <a:bodyPr/>
+          <a:lstStyle/>
+          <a:p>
+            <a:r>
+              <a:t>Configure DbContext</a:t>
+            </a:r>
+          </a:p>
+        </p:txBody>
+      </p:sp>
+      <p:sp>
+        <p:nvSpPr>
+          <p:cNvPr id="3" name="Content Placeholder 2"/>
+          <p:cNvSpPr>
+            <a:spLocks noGrp="1"/>
+          </p:cNvSpPr>
+          <p:nvPr>
+            <p:ph idx="1"/>
+          </p:nvPr>
+        </p:nvSpPr>
+        <p:spPr/>
+        <p:txBody>
+          <a:bodyPr/>
+          <a:lstStyle/>
+          <a:p>
+            <a:r>
+              <a:t>builder.Services.AddDbContext&lt;AppDbContext&gt;(options =&gt;</a:t>
+            </a:r>
+          </a:p>
+          <a:p>
+            <a:r>
+              <a:t>options.UseSqlServer(connectionString));</a:t>
             </a:r>
           </a:p>
         </p:txBody>
